--- a/markdown/files/slides/lecture3_analysis2.pptx
+++ b/markdown/files/slides/lecture3_analysis2.pptx
@@ -3927,15 +3927,7 @@
           <a:p>
             <a:r>
               <a:rPr lang="en-US" dirty="0"/>
-              <a:t>CSE </a:t>
-            </a:r>
-            <a:r>
-              <a:rPr lang="en-US"/>
-              <a:t>332 Spring </a:t>
-            </a:r>
-            <a:r>
-              <a:rPr lang="en-US" dirty="0"/>
-              <a:t>2026</a:t>
+              <a:t>CSE 332 Spring 2026</a:t>
             </a:r>
             <a:br>
               <a:rPr lang="en-US" dirty="0"/>
@@ -15881,7 +15873,7 @@
                 </a14:m>
                 <a:r>
                   <a:rPr lang="en-US" dirty="0"/>
-                  <a:t> will result in adding </a:t>
+                  <a:t> will cause “add </a:t>
                 </a:r>
                 <a14:m>
                   <m:oMath xmlns:m="http://schemas.openxmlformats.org/officeDocument/2006/math">
@@ -15895,7 +15887,7 @@
                 </a14:m>
                 <a:r>
                   <a:rPr lang="en-US" dirty="0"/>
-                  <a:t> being less than multiplying by </a:t>
+                  <a:t>” to have less impact than “multiply by </a:t>
                 </a:r>
                 <a14:m>
                   <m:oMath xmlns:m="http://schemas.openxmlformats.org/officeDocument/2006/math">
@@ -15909,7 +15901,7 @@
                 </a14:m>
                 <a:r>
                   <a:rPr lang="en-US" dirty="0"/>
-                  <a:t>.</a:t>
+                  <a:t>”.</a:t>
                 </a:r>
               </a:p>
               <a:p>
@@ -15932,7 +15924,7 @@
                       <a:rPr lang="en-US" b="0" i="1" smtClean="0">
                         <a:latin typeface="Cambria Math" panose="02040503050406030204" pitchFamily="18" charset="0"/>
                       </a:rPr>
-                      <m:t>&gt;10</m:t>
+                      <m:t>≥10</m:t>
                     </m:r>
                   </m:oMath>
                 </a14:m>
@@ -16017,6 +16009,51 @@
                         <a:latin typeface="Cambria Math" panose="02040503050406030204" pitchFamily="18" charset="0"/>
                       </a:rPr>
                       <m:t>≤</m:t>
+                    </m:r>
+                    <m:sSup>
+                      <m:sSupPr>
+                        <m:ctrlPr>
+                          <a:rPr lang="en-US" b="0" i="1" smtClean="0">
+                            <a:latin typeface="Cambria Math" panose="02040503050406030204" pitchFamily="18" charset="0"/>
+                          </a:rPr>
+                        </m:ctrlPr>
+                      </m:sSupPr>
+                      <m:e>
+                        <m:r>
+                          <a:rPr lang="en-US" b="0" i="1" smtClean="0">
+                            <a:latin typeface="Cambria Math" panose="02040503050406030204" pitchFamily="18" charset="0"/>
+                          </a:rPr>
+                          <m:t>𝑛</m:t>
+                        </m:r>
+                      </m:e>
+                      <m:sup>
+                        <m:r>
+                          <a:rPr lang="en-US" b="0" i="1" smtClean="0">
+                            <a:latin typeface="Cambria Math" panose="02040503050406030204" pitchFamily="18" charset="0"/>
+                          </a:rPr>
+                          <m:t>2</m:t>
+                        </m:r>
+                      </m:sup>
+                    </m:sSup>
+                  </m:oMath>
+                </a14:m>
+                <a:r>
+                  <a:rPr lang="en-US" dirty="0"/>
+                  <a:t>, so </a:t>
+                </a:r>
+                <a14:m>
+                  <m:oMath xmlns:m="http://schemas.openxmlformats.org/officeDocument/2006/math">
+                    <m:r>
+                      <a:rPr lang="en-US" b="0" i="1" smtClean="0">
+                        <a:latin typeface="Cambria Math" panose="02040503050406030204" pitchFamily="18" charset="0"/>
+                      </a:rPr>
+                      <m:t>𝑛</m:t>
+                    </m:r>
+                    <m:r>
+                      <a:rPr lang="en-US" b="0" i="1" smtClean="0">
+                        <a:latin typeface="Cambria Math" panose="02040503050406030204" pitchFamily="18" charset="0"/>
+                      </a:rPr>
+                      <m:t>+10≤</m:t>
                     </m:r>
                     <m:sSup>
                       <m:sSupPr>
